--- a/Everyone/piparty.pptx
+++ b/Everyone/piparty.pptx
@@ -111,6 +111,11 @@
       </a:defRPr>
     </a:lvl9pPr>
   </p:defaultTextStyle>
+  <p:extLst>
+    <p:ext uri="{EFAFB233-063F-42B5-8137-9DF3F51BA10A}">
+      <p15:sldGuideLst xmlns:p15="http://schemas.microsoft.com/office/powerpoint/2012/main"/>
+    </p:ext>
+  </p:extLst>
 </p:presentation>
 </file>
 
@@ -344,7 +349,7 @@
             <a:fld id="{11A6662E-FAF4-44BC-88B5-85A7CBFB6D30}" type="datetime1">
               <a:rPr lang="en-US" smtClean="0"/>
               <a:pPr/>
-              <a:t>4/28/26</a:t>
+              <a:t>4/30/26</a:t>
             </a:fld>
             <a:endParaRPr lang="en-US" dirty="0"/>
           </a:p>
@@ -686,7 +691,7 @@
             <a:fld id="{57E0CF6C-748E-4B7A-BC8B-3011EF78ED13}" type="datetime1">
               <a:rPr lang="en-US" smtClean="0"/>
               <a:pPr/>
-              <a:t>4/28/26</a:t>
+              <a:t>4/30/26</a:t>
             </a:fld>
             <a:endParaRPr lang="en-US" dirty="0"/>
           </a:p>
@@ -973,7 +978,7 @@
             <a:fld id="{57E0CF6C-748E-4B7A-BC8B-3011EF78ED13}" type="datetime1">
               <a:rPr lang="en-US" smtClean="0"/>
               <a:pPr/>
-              <a:t>4/28/26</a:t>
+              <a:t>4/30/26</a:t>
             </a:fld>
             <a:endParaRPr lang="en-US" dirty="0"/>
           </a:p>
@@ -1550,7 +1555,7 @@
             <a:fld id="{57E0CF6C-748E-4B7A-BC8B-3011EF78ED13}" type="datetime1">
               <a:rPr lang="en-US" smtClean="0"/>
               <a:pPr/>
-              <a:t>4/28/26</a:t>
+              <a:t>4/30/26</a:t>
             </a:fld>
             <a:endParaRPr lang="en-US" dirty="0"/>
           </a:p>
@@ -1837,7 +1842,7 @@
             <a:fld id="{57E0CF6C-748E-4B7A-BC8B-3011EF78ED13}" type="datetime1">
               <a:rPr lang="en-US" smtClean="0"/>
               <a:pPr/>
-              <a:t>4/28/26</a:t>
+              <a:t>4/30/26</a:t>
             </a:fld>
             <a:endParaRPr lang="en-US" dirty="0"/>
           </a:p>
@@ -2408,7 +2413,7 @@
             <a:fld id="{57E0CF6C-748E-4B7A-BC8B-3011EF78ED13}" type="datetime1">
               <a:rPr lang="en-US" smtClean="0"/>
               <a:pPr/>
-              <a:t>4/28/26</a:t>
+              <a:t>4/30/26</a:t>
             </a:fld>
             <a:endParaRPr lang="en-US" dirty="0"/>
           </a:p>
@@ -2744,7 +2749,7 @@
             <a:fld id="{57E0CF6C-748E-4B7A-BC8B-3011EF78ED13}" type="datetime1">
               <a:rPr lang="en-US" smtClean="0"/>
               <a:pPr/>
-              <a:t>4/28/26</a:t>
+              <a:t>4/30/26</a:t>
             </a:fld>
             <a:endParaRPr lang="en-US" dirty="0"/>
           </a:p>
@@ -2957,7 +2962,7 @@
           <a:p>
             <a:fld id="{4C559632-1575-4E14-B53B-3DC3D5ED3947}" type="datetime1">
               <a:rPr lang="en-US" smtClean="0"/>
-              <a:t>4/28/26</a:t>
+              <a:t>4/30/26</a:t>
             </a:fld>
             <a:endParaRPr lang="en-US"/>
           </a:p>
@@ -3167,7 +3172,7 @@
           <a:p>
             <a:fld id="{CC4A6868-2568-4CC9-B302-F37117B01A6E}" type="datetime1">
               <a:rPr lang="en-US" smtClean="0"/>
-              <a:t>4/28/26</a:t>
+              <a:t>4/30/26</a:t>
             </a:fld>
             <a:endParaRPr lang="en-US"/>
           </a:p>
@@ -3367,7 +3372,7 @@
           <a:p>
             <a:fld id="{0055F08A-1E71-4B2B-BB49-E743F2903911}" type="datetime1">
               <a:rPr lang="en-US" smtClean="0"/>
-              <a:t>4/28/26</a:t>
+              <a:t>4/30/26</a:t>
             </a:fld>
             <a:endParaRPr lang="en-US" dirty="0"/>
           </a:p>
@@ -3643,7 +3648,7 @@
           <a:p>
             <a:fld id="{15417D9E-721A-44BB-8863-9873FE64DA75}" type="datetime1">
               <a:rPr lang="en-US" smtClean="0"/>
-              <a:t>4/28/26</a:t>
+              <a:t>4/30/26</a:t>
             </a:fld>
             <a:endParaRPr lang="en-US"/>
           </a:p>
@@ -3909,7 +3914,7 @@
           <a:p>
             <a:fld id="{5F31DA2F-80B8-49CF-99FB-5ABCA53A607A}" type="datetime1">
               <a:rPr lang="en-US" smtClean="0"/>
-              <a:t>4/28/26</a:t>
+              <a:t>4/30/26</a:t>
             </a:fld>
             <a:endParaRPr lang="en-US"/>
           </a:p>
@@ -4283,7 +4288,7 @@
           <a:p>
             <a:fld id="{28852172-E6C9-4B6C-929A-A9DE3837BBF1}" type="datetime1">
               <a:rPr lang="en-US" smtClean="0"/>
-              <a:t>4/28/26</a:t>
+              <a:t>4/30/26</a:t>
             </a:fld>
             <a:endParaRPr lang="en-US"/>
           </a:p>
@@ -4431,7 +4436,7 @@
           <a:p>
             <a:fld id="{3AB41CFF-90C9-47B3-9DA1-F2BF8D839F7E}" type="datetime1">
               <a:rPr lang="en-US" smtClean="0"/>
-              <a:t>4/28/26</a:t>
+              <a:t>4/30/26</a:t>
             </a:fld>
             <a:endParaRPr lang="en-US"/>
           </a:p>
@@ -4556,7 +4561,7 @@
           <a:p>
             <a:fld id="{F06048FA-06AB-4884-A69B-986B96E68A24}" type="datetime1">
               <a:rPr lang="en-US" smtClean="0"/>
-              <a:t>4/28/26</a:t>
+              <a:t>4/30/26</a:t>
             </a:fld>
             <a:endParaRPr lang="en-US"/>
           </a:p>
@@ -4841,7 +4846,7 @@
           <a:p>
             <a:fld id="{50DB7ABA-0172-4F9C-889D-567164F66BCD}" type="datetime1">
               <a:rPr lang="en-US" smtClean="0"/>
-              <a:t>4/28/26</a:t>
+              <a:t>4/30/26</a:t>
             </a:fld>
             <a:endParaRPr lang="en-US"/>
           </a:p>
@@ -5165,7 +5170,7 @@
           <a:p>
             <a:fld id="{78AC6A5B-8AE7-4A41-B5A7-9ADC6686DC18}" type="datetime1">
               <a:rPr lang="en-US" smtClean="0"/>
-              <a:t>4/28/26</a:t>
+              <a:t>4/30/26</a:t>
             </a:fld>
             <a:endParaRPr lang="en-US"/>
           </a:p>
@@ -5380,7 +5385,7 @@
             <a:fld id="{57E0CF6C-748E-4B7A-BC8B-3011EF78ED13}" type="datetime1">
               <a:rPr lang="en-US" smtClean="0"/>
               <a:pPr/>
-              <a:t>4/28/26</a:t>
+              <a:t>4/30/26</a:t>
             </a:fld>
             <a:endParaRPr lang="en-US" dirty="0"/>
           </a:p>
@@ -6861,7 +6866,7 @@
         </p:nvSpPr>
         <p:spPr>
           <a:xfrm>
-            <a:off x="685801" y="0"/>
+            <a:off x="685801" y="-164123"/>
             <a:ext cx="10131425" cy="1456267"/>
           </a:xfrm>
         </p:spPr>
@@ -6897,13 +6902,212 @@
         </p:nvSpPr>
         <p:spPr>
           <a:xfrm>
-            <a:off x="685800" y="1604433"/>
-            <a:ext cx="10131425" cy="4414230"/>
-          </a:xfrm>
-        </p:spPr>
-        <p:txBody>
-          <a:bodyPr/>
-          <a:lstStyle/>
+            <a:off x="685800" y="1103272"/>
+            <a:ext cx="6921500" cy="5754728"/>
+          </a:xfrm>
+        </p:spPr>
+        <p:txBody>
+          <a:bodyPr>
+            <a:normAutofit fontScale="92500" lnSpcReduction="10000"/>
+          </a:bodyPr>
+          <a:lstStyle/>
+          <a:p>
+            <a:r>
+              <a:rPr lang="en-US" b="1" dirty="0">
+                <a:latin typeface="LEMON MILK Medium" pitchFamily="2" charset="77"/>
+              </a:rPr>
+              <a:t>Purpose:</a:t>
+            </a:r>
+            <a:r>
+              <a:rPr lang="en-US" dirty="0">
+                <a:latin typeface="LEMON MILK Medium" pitchFamily="2" charset="77"/>
+              </a:rPr>
+              <a:t> Demonstrates real-time coordination tracking and collision detection within a terminal environment. </a:t>
+            </a:r>
+          </a:p>
+          <a:p>
+            <a:r>
+              <a:rPr lang="en-US" b="1" dirty="0">
+                <a:effectLst/>
+                <a:latin typeface="LEMON MILK Medium" pitchFamily="2" charset="77"/>
+              </a:rPr>
+              <a:t>Python Functions &amp; Logic:</a:t>
+            </a:r>
+            <a:endParaRPr lang="en-US" dirty="0">
+              <a:effectLst/>
+              <a:latin typeface="LEMON MILK Medium" pitchFamily="2" charset="77"/>
+            </a:endParaRPr>
+          </a:p>
+          <a:p>
+            <a:pPr>
+              <a:buFont typeface="Arial" panose="020B0604020202020204" pitchFamily="34" charset="0"/>
+              <a:buChar char="•"/>
+            </a:pPr>
+            <a:r>
+              <a:rPr lang="en-US" b="1" dirty="0" err="1">
+                <a:effectLst/>
+                <a:latin typeface="LEMON MILK Medium" pitchFamily="2" charset="77"/>
+              </a:rPr>
+              <a:t>curses.wrapper</a:t>
+            </a:r>
+            <a:r>
+              <a:rPr lang="en-US" b="1" dirty="0">
+                <a:effectLst/>
+                <a:latin typeface="LEMON MILK Medium" pitchFamily="2" charset="77"/>
+              </a:rPr>
+              <a:t>()</a:t>
+            </a:r>
+            <a:r>
+              <a:rPr lang="en-US" dirty="0">
+                <a:effectLst/>
+                <a:latin typeface="LEMON MILK Medium" pitchFamily="2" charset="77"/>
+              </a:rPr>
+              <a:t>: Switches the terminal into a "game window" that allows for colored graphics and exact positioning of characters. </a:t>
+            </a:r>
+          </a:p>
+          <a:p>
+            <a:pPr>
+              <a:buFont typeface="Arial" panose="020B0604020202020204" pitchFamily="34" charset="0"/>
+              <a:buChar char="•"/>
+            </a:pPr>
+            <a:r>
+              <a:rPr lang="en-US" b="1" dirty="0">
+                <a:effectLst/>
+                <a:latin typeface="LEMON MILK Medium" pitchFamily="2" charset="77"/>
+              </a:rPr>
+              <a:t>Coordinate Management</a:t>
+            </a:r>
+            <a:r>
+              <a:rPr lang="en-US" dirty="0">
+                <a:effectLst/>
+                <a:latin typeface="LEMON MILK Medium" pitchFamily="2" charset="77"/>
+              </a:rPr>
+              <a:t>: Stores the snake's body as a </a:t>
+            </a:r>
+            <a:r>
+              <a:rPr lang="en-US" b="1" dirty="0">
+                <a:effectLst/>
+                <a:latin typeface="LEMON MILK Medium" pitchFamily="2" charset="77"/>
+              </a:rPr>
+              <a:t>list of (x, y) points</a:t>
+            </a:r>
+            <a:r>
+              <a:rPr lang="en-US" dirty="0">
+                <a:effectLst/>
+                <a:latin typeface="LEMON MILK Medium" pitchFamily="2" charset="77"/>
+              </a:rPr>
+              <a:t> to track every segment on the 28 X 14 grid. </a:t>
+            </a:r>
+          </a:p>
+          <a:p>
+            <a:pPr>
+              <a:buFont typeface="Arial" panose="020B0604020202020204" pitchFamily="34" charset="0"/>
+              <a:buChar char="•"/>
+            </a:pPr>
+            <a:r>
+              <a:rPr lang="en-US" b="1" dirty="0">
+                <a:effectLst/>
+                <a:latin typeface="LEMON MILK Medium" pitchFamily="2" charset="77"/>
+              </a:rPr>
+              <a:t>_</a:t>
+            </a:r>
+            <a:r>
+              <a:rPr lang="en-US" b="1" dirty="0" err="1">
+                <a:effectLst/>
+                <a:latin typeface="LEMON MILK Medium" pitchFamily="2" charset="77"/>
+              </a:rPr>
+              <a:t>is_wall</a:t>
+            </a:r>
+            <a:r>
+              <a:rPr lang="en-US" b="1" dirty="0">
+                <a:effectLst/>
+                <a:latin typeface="LEMON MILK Medium" pitchFamily="2" charset="77"/>
+              </a:rPr>
+              <a:t>()</a:t>
+            </a:r>
+            <a:r>
+              <a:rPr lang="en-US" dirty="0">
+                <a:effectLst/>
+                <a:latin typeface="LEMON MILK Medium" pitchFamily="2" charset="77"/>
+              </a:rPr>
+              <a:t>: A boundary check that ends the game instantly if the snake's head hits the edge of the grid. </a:t>
+            </a:r>
+          </a:p>
+          <a:p>
+            <a:pPr>
+              <a:buFont typeface="Arial" panose="020B0604020202020204" pitchFamily="34" charset="0"/>
+              <a:buChar char="•"/>
+            </a:pPr>
+            <a:r>
+              <a:rPr lang="en-US" b="1" dirty="0">
+                <a:effectLst/>
+                <a:latin typeface="LEMON MILK Medium" pitchFamily="2" charset="77"/>
+              </a:rPr>
+              <a:t>_</a:t>
+            </a:r>
+            <a:r>
+              <a:rPr lang="en-US" b="1" dirty="0" err="1">
+                <a:effectLst/>
+                <a:latin typeface="LEMON MILK Medium" pitchFamily="2" charset="77"/>
+              </a:rPr>
+              <a:t>spawn_apple</a:t>
+            </a:r>
+            <a:r>
+              <a:rPr lang="en-US" b="1" dirty="0">
+                <a:effectLst/>
+                <a:latin typeface="LEMON MILK Medium" pitchFamily="2" charset="77"/>
+              </a:rPr>
+              <a:t>()</a:t>
+            </a:r>
+            <a:r>
+              <a:rPr lang="en-US" dirty="0">
+                <a:effectLst/>
+                <a:latin typeface="LEMON MILK Medium" pitchFamily="2" charset="77"/>
+              </a:rPr>
+              <a:t>: scans for empty spaces to ensure new apples don't appear inside walls or the snake's body. </a:t>
+            </a:r>
+          </a:p>
+          <a:p>
+            <a:pPr>
+              <a:buFont typeface="Arial" panose="020B0604020202020204" pitchFamily="34" charset="0"/>
+              <a:buChar char="•"/>
+            </a:pPr>
+            <a:r>
+              <a:rPr lang="en-US" b="1" dirty="0" err="1">
+                <a:effectLst/>
+                <a:latin typeface="LEMON MILK Medium" pitchFamily="2" charset="77"/>
+              </a:rPr>
+              <a:t>stdscr.timeout</a:t>
+            </a:r>
+            <a:r>
+              <a:rPr lang="en-US" b="1" dirty="0">
+                <a:effectLst/>
+                <a:latin typeface="LEMON MILK Medium" pitchFamily="2" charset="77"/>
+              </a:rPr>
+              <a:t>()</a:t>
+            </a:r>
+            <a:r>
+              <a:rPr lang="en-US" dirty="0">
+                <a:effectLst/>
+                <a:latin typeface="LEMON MILK Medium" pitchFamily="2" charset="77"/>
+              </a:rPr>
+              <a:t>: Sets the </a:t>
+            </a:r>
+            <a:r>
+              <a:rPr lang="en-US" b="1" dirty="0">
+                <a:effectLst/>
+                <a:latin typeface="LEMON MILK Medium" pitchFamily="2" charset="77"/>
+              </a:rPr>
+              <a:t>game speed</a:t>
+            </a:r>
+            <a:r>
+              <a:rPr lang="en-US" dirty="0">
+                <a:effectLst/>
+                <a:latin typeface="LEMON MILK Medium" pitchFamily="2" charset="77"/>
+              </a:rPr>
+              <a:t> (0.12s), which determines how fast the snake moves and how often the screen refreshes. </a:t>
+            </a:r>
+          </a:p>
           <a:p>
             <a:endParaRPr lang="en-US" dirty="0"/>
           </a:p>
